--- a/apps/resources/bundled_files/5-klass-10-100-1000-sabak.pptx
+++ b/apps/resources/bundled_files/5-klass-10-100-1000-sabak.pptx
@@ -5196,7 +5196,7 @@
                 </a:solidFill>
                 <a:latin typeface="PT Sans"/>
               </a:rPr>
-              <a:t>5-класс · Математика</a:t>
+              <a:t/>
             </a:r>
           </a:p>
         </p:txBody>
@@ -5688,7 +5688,7 @@
                 </a:solidFill>
                 <a:latin typeface="PT Sans"/>
               </a:rPr>
-              <a:t>5-класс ›</a:t>
+              <a:t/>
             </a:r>
           </a:p>
           <a:p>
@@ -6637,7 +6637,7 @@
                 </a:solidFill>
                 <a:latin typeface="PT Sans"/>
               </a:rPr>
-              <a:t>5-класс ›</a:t>
+              <a:t/>
             </a:r>
           </a:p>
           <a:p>
@@ -12478,7 +12478,7 @@
                 </a:solidFill>
                 <a:latin typeface="PT Sans"/>
               </a:rPr>
-              <a:t>5-класс ›</a:t>
+              <a:t/>
             </a:r>
           </a:p>
           <a:p>
@@ -16010,7 +16010,7 @@
                 </a:solidFill>
                 <a:latin typeface="PT Sans"/>
               </a:rPr>
-              <a:t>5-класс ›</a:t>
+              <a:t/>
             </a:r>
           </a:p>
           <a:p>
@@ -17593,7 +17593,7 @@
                 </a:solidFill>
                 <a:latin typeface="PT Sans"/>
               </a:rPr>
-              <a:t>5-класс ›</a:t>
+              <a:t/>
             </a:r>
           </a:p>
           <a:p>
@@ -18422,7 +18422,7 @@
                 </a:solidFill>
                 <a:latin typeface="PT Sans"/>
               </a:rPr>
-              <a:t>5-класс ›</a:t>
+              <a:t/>
             </a:r>
           </a:p>
           <a:p>
@@ -19251,7 +19251,7 @@
                 </a:solidFill>
                 <a:latin typeface="PT Sans"/>
               </a:rPr>
-              <a:t>5-класс ›</a:t>
+              <a:t/>
             </a:r>
           </a:p>
           <a:p>
@@ -20917,7 +20917,7 @@
                 </a:solidFill>
                 <a:latin typeface="PT Sans"/>
               </a:rPr>
-              <a:t>5-класс ›</a:t>
+              <a:t/>
             </a:r>
           </a:p>
           <a:p>
@@ -22001,7 +22001,7 @@
                 </a:solidFill>
                 <a:latin typeface="PT Sans"/>
               </a:rPr>
-              <a:t>5-класс ›</a:t>
+              <a:t/>
             </a:r>
           </a:p>
           <a:p>
@@ -23531,7 +23531,7 @@
                 </a:solidFill>
                 <a:latin typeface="PT Sans"/>
               </a:rPr>
-              <a:t>5-класс ›</a:t>
+              <a:t/>
             </a:r>
           </a:p>
           <a:p>
@@ -25346,7 +25346,7 @@
                 </a:solidFill>
                 <a:latin typeface="PT Sans"/>
               </a:rPr>
-              <a:t>5-класс ›</a:t>
+              <a:t/>
             </a:r>
           </a:p>
           <a:p>
@@ -26623,7 +26623,7 @@
                 </a:solidFill>
                 <a:latin typeface="PT Sans"/>
               </a:rPr>
-              <a:t>5-класс ›</a:t>
+              <a:t/>
             </a:r>
           </a:p>
           <a:p>
@@ -28051,7 +28051,7 @@
                 </a:solidFill>
                 <a:latin typeface="PT Sans"/>
               </a:rPr>
-              <a:t>5-класс ›</a:t>
+              <a:t/>
             </a:r>
           </a:p>
           <a:p>
@@ -29507,7 +29507,7 @@
                 </a:solidFill>
                 <a:latin typeface="PT Sans"/>
               </a:rPr>
-              <a:t>5-класс ›</a:t>
+              <a:t/>
             </a:r>
           </a:p>
           <a:p>
@@ -30726,7 +30726,7 @@
                 </a:solidFill>
                 <a:latin typeface="PT Sans"/>
               </a:rPr>
-              <a:t>5-класс ›</a:t>
+              <a:t/>
             </a:r>
           </a:p>
           <a:p>
@@ -31526,7 +31526,7 @@
                 </a:solidFill>
                 <a:latin typeface="PT Sans"/>
               </a:rPr>
-              <a:t>5-класс ›</a:t>
+              <a:t/>
             </a:r>
           </a:p>
           <a:p>
@@ -32367,7 +32367,7 @@
                 </a:solidFill>
                 <a:latin typeface="PT Sans"/>
               </a:rPr>
-              <a:t>5-класс ›</a:t>
+              <a:t/>
             </a:r>
           </a:p>
           <a:p>
@@ -33316,7 +33316,7 @@
                 </a:solidFill>
                 <a:latin typeface="PT Sans"/>
               </a:rPr>
-              <a:t>5-класс ›</a:t>
+              <a:t/>
             </a:r>
           </a:p>
           <a:p>
@@ -34770,7 +34770,7 @@
                 </a:solidFill>
                 <a:latin typeface="PT Sans"/>
               </a:rPr>
-              <a:t>5-класс ›</a:t>
+              <a:t/>
             </a:r>
           </a:p>
           <a:p>
@@ -35516,7 +35516,7 @@
                 </a:solidFill>
                 <a:latin typeface="PT Sans"/>
               </a:rPr>
-              <a:t>5-класс ›</a:t>
+              <a:t/>
             </a:r>
           </a:p>
           <a:p>
@@ -36324,7 +36324,7 @@
                 </a:solidFill>
                 <a:latin typeface="PT Sans"/>
               </a:rPr>
-              <a:t>5-класс ›</a:t>
+              <a:t/>
             </a:r>
           </a:p>
           <a:p>
@@ -37515,7 +37515,7 @@
                 </a:solidFill>
                 <a:latin typeface="PT Sans"/>
               </a:rPr>
-              <a:t>5-класс ›</a:t>
+              <a:t/>
             </a:r>
           </a:p>
           <a:p>
@@ -38694,7 +38694,7 @@
                 </a:solidFill>
                 <a:latin typeface="PT Sans"/>
               </a:rPr>
-              <a:t>5-класс ›</a:t>
+              <a:t/>
             </a:r>
           </a:p>
           <a:p>
@@ -38875,7 +38875,7 @@
                 </a:solidFill>
                 <a:latin typeface="PT Sans"/>
               </a:rPr>
-              <a:t>4-класс</a:t>
+              <a:t/>
             </a:r>
           </a:p>
         </p:txBody>
@@ -39055,7 +39055,7 @@
                 </a:solidFill>
                 <a:latin typeface="PT Sans"/>
               </a:rPr>
-              <a:t>5-класс</a:t>
+              <a:t/>
             </a:r>
           </a:p>
         </p:txBody>
@@ -39235,7 +39235,7 @@
                 </a:solidFill>
                 <a:latin typeface="PT Sans"/>
               </a:rPr>
-              <a:t>5-класс</a:t>
+              <a:t/>
             </a:r>
           </a:p>
         </p:txBody>
@@ -39471,7 +39471,7 @@
                 </a:solidFill>
                 <a:latin typeface="PT Sans"/>
               </a:rPr>
-              <a:t>5-класс</a:t>
+              <a:t/>
             </a:r>
           </a:p>
         </p:txBody>
@@ -39891,7 +39891,7 @@
                 </a:solidFill>
                 <a:latin typeface="PT Sans"/>
               </a:rPr>
-              <a:t>5-класс ›</a:t>
+              <a:t/>
             </a:r>
           </a:p>
           <a:p>
@@ -41039,7 +41039,7 @@
                 </a:solidFill>
                 <a:latin typeface="PT Sans"/>
               </a:rPr>
-              <a:t>5-класс ›</a:t>
+              <a:t/>
             </a:r>
           </a:p>
           <a:p>

--- a/apps/resources/bundled_files/5-klass-10-100-1000-sabak.pptx
+++ b/apps/resources/bundled_files/5-klass-10-100-1000-sabak.pptx
@@ -1582,7 +1582,7 @@
           <a:lstStyle/>
           <a:p>
             <a:r>
-              <a:t>Ой жүгүртүү маданияты (Wenxi Lee, 2.6).</a:t>
+              <a:t>Ой жүгүртүү маданияты (Wenxi Lee, 2,6).</a:t>
             </a:r>
           </a:p>
         </p:txBody>
